--- a/public/fun/cards/finance/finance-08.pptx
+++ b/public/fun/cards/finance/finance-08.pptx
@@ -3085,7 +3085,7 @@
     <p:bg>
       <p:bgPr>
         <a:solidFill>
-          <a:srgbClr val="FBF8F2"/>
+          <a:srgbClr val="EAF5FF"/>
         </a:solidFill>
         <a:effectLst/>
       </p:bgPr>
@@ -3105,14 +3105,14 @@
         </p:nvSpPr>
         <p:spPr>
           <a:xfrm>
-            <a:off x="1944000" y="216000"/>
-            <a:ext cx="10800" cy="1368000"/>
+            <a:off x="252000" y="144000"/>
+            <a:ext cx="201600" cy="21600"/>
           </a:xfrm>
           <a:prstGeom prst="rect">
             <a:avLst/>
           </a:prstGeom>
           <a:solidFill>
-            <a:srgbClr val="3B9151"/>
+            <a:srgbClr val="2E9BFF"/>
           </a:solidFill>
           <a:ln>
             <a:noFill/>
@@ -3134,8 +3134,8 @@
         </p:nvSpPr>
         <p:spPr>
           <a:xfrm>
-            <a:off x="216000" y="201600"/>
-            <a:ext cx="1584000" cy="100800"/>
+            <a:off x="252000" y="273600"/>
+            <a:ext cx="2160000" cy="360000"/>
           </a:xfrm>
           <a:prstGeom prst="rect">
             <a:avLst/>
@@ -3150,137 +3150,32 @@
           <a:p>
             <a:pPr algn="l">
               <a:lnSpc>
-                <a:spcPts val="1015"/>
+                <a:spcPts val="3190"/>
               </a:lnSpc>
             </a:pPr>
             <a:r>
-              <a:rPr sz="700" b="1" spc="300">
+              <a:rPr sz="2200" b="1">
                 <a:solidFill>
-                  <a:srgbClr val="995E6A"/>
+                  <a:srgbClr val="12151C"/>
                 </a:solidFill>
                 <a:latin typeface="맑은 고딕"/>
                 <a:ea typeface="맑은 고딕"/>
               </a:rPr>
-              <a:t>회사 · 사무소 이름</a:t>
-            </a:r>
-          </a:p>
-        </p:txBody>
-      </p:sp>
-      <p:sp>
-        <p:nvSpPr>
-          <p:cNvPr id="4" name="Freeform 3"/>
-          <p:cNvSpPr/>
+              <a:t>윤시우</a:t>
+            </a:r>
+          </a:p>
+        </p:txBody>
+      </p:sp>
+      <p:sp>
+        <p:nvSpPr>
+          <p:cNvPr id="4" name="텍스트"/>
+          <p:cNvSpPr txBox="1"/>
           <p:nvPr/>
         </p:nvSpPr>
         <p:spPr>
           <a:xfrm>
-            <a:off x="286704" y="440208"/>
-            <a:ext cx="218592" cy="99792"/>
-          </a:xfrm>
-          <a:custGeom>
-            <a:avLst/>
-            <a:gdLst/>
-            <a:ahLst/>
-            <a:cxnLst/>
-            <a:rect l="l" t="t" r="r" b="b"/>
-            <a:pathLst>
-              <a:path w="218592" h="99792">
-                <a:moveTo>
-                  <a:pt x="0" y="99792"/>
-                </a:moveTo>
-                <a:lnTo>
-                  <a:pt x="109296" y="0"/>
-                </a:lnTo>
-                <a:lnTo>
-                  <a:pt x="218592" y="99792"/>
-                </a:lnTo>
-                <a:close/>
-              </a:path>
-            </a:pathLst>
-          </a:custGeom>
-          <a:solidFill>
-            <a:srgbClr val="3B9151"/>
-          </a:solidFill>
-          <a:ln>
-            <a:noFill/>
-          </a:ln>
-        </p:spPr>
-        <p:txBody>
-          <a:bodyPr rtlCol="0" anchor="ctr"/>
-          <a:lstStyle/>
-          <a:p>
-            <a:pPr algn="ctr"/>
-          </a:p>
-        </p:txBody>
-      </p:sp>
-      <p:sp>
-        <p:nvSpPr>
-          <p:cNvPr id="5" name="Rectangle 4"/>
-          <p:cNvSpPr/>
-          <p:nvPr/>
-        </p:nvSpPr>
-        <p:spPr>
-          <a:xfrm>
-            <a:off x="319968" y="540000"/>
-            <a:ext cx="152064" cy="99792"/>
-          </a:xfrm>
-          <a:prstGeom prst="rect">
-            <a:avLst/>
-          </a:prstGeom>
-          <a:solidFill>
-            <a:srgbClr val="C8E0CE"/>
-          </a:solidFill>
-          <a:ln>
-            <a:noFill/>
-          </a:ln>
-        </p:spPr>
-        <p:txBody>
-          <a:bodyPr rtlCol="0" anchor="ctr"/>
-          <a:lstStyle/>
-          <a:p>
-            <a:pPr algn="ctr"/>
-          </a:p>
-        </p:txBody>
-      </p:sp>
-      <p:sp>
-        <p:nvSpPr>
-          <p:cNvPr id="6" name="Rectangle 5"/>
-          <p:cNvSpPr/>
-          <p:nvPr/>
-        </p:nvSpPr>
-        <p:spPr>
-          <a:xfrm>
-            <a:off x="376992" y="573264"/>
-            <a:ext cx="38016" cy="66528"/>
-          </a:xfrm>
-          <a:prstGeom prst="rect">
-            <a:avLst/>
-          </a:prstGeom>
-          <a:solidFill>
-            <a:srgbClr val="3B9151"/>
-          </a:solidFill>
-          <a:ln>
-            <a:noFill/>
-          </a:ln>
-        </p:spPr>
-        <p:txBody>
-          <a:bodyPr rtlCol="0" anchor="ctr"/>
-          <a:lstStyle/>
-          <a:p>
-            <a:pPr algn="ctr"/>
-          </a:p>
-        </p:txBody>
-      </p:sp>
-      <p:sp>
-        <p:nvSpPr>
-          <p:cNvPr id="7" name="텍스트"/>
-          <p:cNvSpPr txBox="1"/>
-          <p:nvPr/>
-        </p:nvSpPr>
-        <p:spPr>
-          <a:xfrm>
-            <a:off x="216000" y="972000"/>
-            <a:ext cx="1728000" cy="122400"/>
+            <a:off x="252000" y="676800"/>
+            <a:ext cx="2160000" cy="171451"/>
           </a:xfrm>
           <a:prstGeom prst="rect">
             <a:avLst/>
@@ -3295,13 +3190,13 @@
           <a:p>
             <a:pPr algn="l">
               <a:lnSpc>
-                <a:spcPts val="1232"/>
+                <a:spcPts val="1305"/>
               </a:lnSpc>
             </a:pPr>
             <a:r>
-              <a:rPr sz="850" b="1">
+              <a:rPr sz="900" b="0">
                 <a:solidFill>
-                  <a:srgbClr val="327B45"/>
+                  <a:srgbClr val="1D4872"/>
                 </a:solidFill>
                 <a:latin typeface="맑은 고딕"/>
                 <a:ea typeface="맑은 고딕"/>
@@ -3313,14 +3208,14 @@
       </p:sp>
       <p:sp>
         <p:nvSpPr>
-          <p:cNvPr id="8" name="텍스트"/>
+          <p:cNvPr id="5" name="텍스트"/>
           <p:cNvSpPr txBox="1"/>
           <p:nvPr/>
         </p:nvSpPr>
         <p:spPr>
           <a:xfrm>
-            <a:off x="216000" y="1123200"/>
-            <a:ext cx="1728000" cy="346712"/>
+            <a:off x="1548000" y="230400"/>
+            <a:ext cx="1440000" cy="123826"/>
           </a:xfrm>
           <a:prstGeom prst="rect">
             <a:avLst/>
@@ -3333,34 +3228,55 @@
           </a:bodyPr>
           <a:lstStyle/>
           <a:p>
-            <a:pPr algn="l">
+            <a:pPr algn="r">
               <a:lnSpc>
-                <a:spcPts val="3045"/>
+                <a:spcPts val="942"/>
               </a:lnSpc>
             </a:pPr>
             <a:r>
-              <a:rPr sz="2100" b="1" spc="50">
+              <a:rPr sz="650" b="1" spc="200">
                 <a:solidFill>
-                  <a:srgbClr val="9E2E4A"/>
+                  <a:srgbClr val="1D4872"/>
                 </a:solidFill>
                 <a:latin typeface="맑은 고딕"/>
                 <a:ea typeface="맑은 고딕"/>
               </a:rPr>
-              <a:t>윤시우</a:t>
-            </a:r>
-          </a:p>
-        </p:txBody>
-      </p:sp>
-      <p:sp>
-        <p:nvSpPr>
-          <p:cNvPr id="9" name="텍스트"/>
+              <a:t>회사 · 사무소 이름</a:t>
+            </a:r>
+          </a:p>
+        </p:txBody>
+      </p:sp>
+      <p:cxnSp>
+        <p:nvCxnSpPr>
+          <p:cNvPr id="6" name="Connector 5"/>
+          <p:cNvCxnSpPr/>
+          <p:nvPr/>
+        </p:nvCxnSpPr>
+        <p:spPr>
+          <a:xfrm>
+            <a:off x="252000" y="1051200"/>
+            <a:ext cx="2736000" cy="0"/>
+          </a:xfrm>
+          <a:prstGeom prst="line">
+            <a:avLst/>
+          </a:prstGeom>
+          <a:ln w="5760">
+            <a:solidFill>
+              <a:srgbClr val="C4E3FF"/>
+            </a:solidFill>
+          </a:ln>
+        </p:spPr>
+      </p:cxnSp>
+      <p:sp>
+        <p:nvSpPr>
+          <p:cNvPr id="7" name="텍스트"/>
           <p:cNvSpPr txBox="1"/>
           <p:nvPr/>
         </p:nvSpPr>
         <p:spPr>
           <a:xfrm>
-            <a:off x="2073600" y="540000"/>
-            <a:ext cx="122400" cy="168911"/>
+            <a:off x="252000" y="1123200"/>
+            <a:ext cx="576000" cy="99061"/>
           </a:xfrm>
           <a:prstGeom prst="rect">
             <a:avLst/>
@@ -3375,32 +3291,32 @@
           <a:p>
             <a:pPr algn="l">
               <a:lnSpc>
-                <a:spcPts val="1015"/>
+                <a:spcPts val="754"/>
               </a:lnSpc>
             </a:pPr>
             <a:r>
-              <a:rPr sz="700" b="1">
+              <a:rPr sz="520" b="1" spc="150">
                 <a:solidFill>
-                  <a:srgbClr val="327B45"/>
+                  <a:srgbClr val="1D4872"/>
                 </a:solidFill>
                 <a:latin typeface="맑은 고딕"/>
                 <a:ea typeface="맑은 고딕"/>
               </a:rPr>
-              <a:t>T</a:t>
-            </a:r>
-          </a:p>
-        </p:txBody>
-      </p:sp>
-      <p:sp>
-        <p:nvSpPr>
-          <p:cNvPr id="10" name="텍스트"/>
+              <a:t>TEL</a:t>
+            </a:r>
+          </a:p>
+        </p:txBody>
+      </p:sp>
+      <p:sp>
+        <p:nvSpPr>
+          <p:cNvPr id="8" name="텍스트"/>
           <p:cNvSpPr txBox="1"/>
           <p:nvPr/>
         </p:nvSpPr>
         <p:spPr>
           <a:xfrm>
-            <a:off x="2217600" y="540000"/>
-            <a:ext cx="900000" cy="168911"/>
+            <a:off x="900000" y="1101600"/>
+            <a:ext cx="2088000" cy="142876"/>
           </a:xfrm>
           <a:prstGeom prst="rect">
             <a:avLst/>
@@ -3415,13 +3331,13 @@
           <a:p>
             <a:pPr algn="l">
               <a:lnSpc>
-                <a:spcPts val="1015"/>
+                <a:spcPts val="1087"/>
               </a:lnSpc>
             </a:pPr>
             <a:r>
-              <a:rPr sz="700" b="0">
+              <a:rPr sz="750" b="0">
                 <a:solidFill>
-                  <a:srgbClr val="9E2E4A"/>
+                  <a:srgbClr val="12151C"/>
                 </a:solidFill>
                 <a:latin typeface="맑은 고딕"/>
                 <a:ea typeface="맑은 고딕"/>
@@ -3431,16 +3347,37 @@
           </a:p>
         </p:txBody>
       </p:sp>
-      <p:sp>
-        <p:nvSpPr>
-          <p:cNvPr id="11" name="텍스트"/>
+      <p:cxnSp>
+        <p:nvCxnSpPr>
+          <p:cNvPr id="9" name="Connector 8"/>
+          <p:cNvCxnSpPr/>
+          <p:nvPr/>
+        </p:nvCxnSpPr>
+        <p:spPr>
+          <a:xfrm>
+            <a:off x="252000" y="1274400"/>
+            <a:ext cx="2736000" cy="0"/>
+          </a:xfrm>
+          <a:prstGeom prst="line">
+            <a:avLst/>
+          </a:prstGeom>
+          <a:ln w="5760">
+            <a:solidFill>
+              <a:srgbClr val="C4E3FF"/>
+            </a:solidFill>
+          </a:ln>
+        </p:spPr>
+      </p:cxnSp>
+      <p:sp>
+        <p:nvSpPr>
+          <p:cNvPr id="10" name="텍스트"/>
           <p:cNvSpPr txBox="1"/>
           <p:nvPr/>
         </p:nvSpPr>
         <p:spPr>
           <a:xfrm>
-            <a:off x="2073600" y="708911"/>
-            <a:ext cx="122400" cy="168911"/>
+            <a:off x="252000" y="1346400"/>
+            <a:ext cx="576000" cy="99061"/>
           </a:xfrm>
           <a:prstGeom prst="rect">
             <a:avLst/>
@@ -3455,32 +3392,32 @@
           <a:p>
             <a:pPr algn="l">
               <a:lnSpc>
-                <a:spcPts val="1015"/>
+                <a:spcPts val="754"/>
               </a:lnSpc>
             </a:pPr>
             <a:r>
-              <a:rPr sz="700" b="1">
+              <a:rPr sz="520" b="1" spc="150">
                 <a:solidFill>
-                  <a:srgbClr val="327B45"/>
+                  <a:srgbClr val="1D4872"/>
                 </a:solidFill>
                 <a:latin typeface="맑은 고딕"/>
                 <a:ea typeface="맑은 고딕"/>
               </a:rPr>
-              <a:t>E</a:t>
-            </a:r>
-          </a:p>
-        </p:txBody>
-      </p:sp>
-      <p:sp>
-        <p:nvSpPr>
-          <p:cNvPr id="12" name="텍스트"/>
+              <a:t>MAIL</a:t>
+            </a:r>
+          </a:p>
+        </p:txBody>
+      </p:sp>
+      <p:sp>
+        <p:nvSpPr>
+          <p:cNvPr id="11" name="텍스트"/>
           <p:cNvSpPr txBox="1"/>
           <p:nvPr/>
         </p:nvSpPr>
         <p:spPr>
           <a:xfrm>
-            <a:off x="2217600" y="708911"/>
-            <a:ext cx="900000" cy="168911"/>
+            <a:off x="900000" y="1324800"/>
+            <a:ext cx="2088000" cy="142876"/>
           </a:xfrm>
           <a:prstGeom prst="rect">
             <a:avLst/>
@@ -3495,13 +3432,13 @@
           <a:p>
             <a:pPr algn="l">
               <a:lnSpc>
-                <a:spcPts val="1015"/>
+                <a:spcPts val="1087"/>
               </a:lnSpc>
             </a:pPr>
             <a:r>
-              <a:rPr sz="700" b="0">
+              <a:rPr sz="750" b="0">
                 <a:solidFill>
-                  <a:srgbClr val="9E2E4A"/>
+                  <a:srgbClr val="12151C"/>
                 </a:solidFill>
                 <a:latin typeface="맑은 고딕"/>
                 <a:ea typeface="맑은 고딕"/>
@@ -3511,6 +3448,27 @@
           </a:p>
         </p:txBody>
       </p:sp>
+      <p:cxnSp>
+        <p:nvCxnSpPr>
+          <p:cNvPr id="12" name="Connector 11"/>
+          <p:cNvCxnSpPr/>
+          <p:nvPr/>
+        </p:nvCxnSpPr>
+        <p:spPr>
+          <a:xfrm>
+            <a:off x="252000" y="1497600"/>
+            <a:ext cx="2736000" cy="0"/>
+          </a:xfrm>
+          <a:prstGeom prst="line">
+            <a:avLst/>
+          </a:prstGeom>
+          <a:ln w="5760">
+            <a:solidFill>
+              <a:srgbClr val="C4E3FF"/>
+            </a:solidFill>
+          </a:ln>
+        </p:spPr>
+      </p:cxnSp>
       <p:sp>
         <p:nvSpPr>
           <p:cNvPr id="13" name="텍스트"/>
@@ -3519,8 +3477,8 @@
         </p:nvSpPr>
         <p:spPr>
           <a:xfrm>
-            <a:off x="2073600" y="877822"/>
-            <a:ext cx="122400" cy="168911"/>
+            <a:off x="252000" y="1569600"/>
+            <a:ext cx="576000" cy="99061"/>
           </a:xfrm>
           <a:prstGeom prst="rect">
             <a:avLst/>
@@ -3535,18 +3493,18 @@
           <a:p>
             <a:pPr algn="l">
               <a:lnSpc>
-                <a:spcPts val="1015"/>
+                <a:spcPts val="754"/>
               </a:lnSpc>
             </a:pPr>
             <a:r>
-              <a:rPr sz="700" b="1">
+              <a:rPr sz="520" b="1" spc="150">
                 <a:solidFill>
-                  <a:srgbClr val="327B45"/>
+                  <a:srgbClr val="1D4872"/>
                 </a:solidFill>
                 <a:latin typeface="맑은 고딕"/>
                 <a:ea typeface="맑은 고딕"/>
               </a:rPr>
-              <a:t>A</a:t>
+              <a:t>ADDR</a:t>
             </a:r>
           </a:p>
         </p:txBody>
@@ -3559,8 +3517,8 @@
         </p:nvSpPr>
         <p:spPr>
           <a:xfrm>
-            <a:off x="2217600" y="877822"/>
-            <a:ext cx="900000" cy="168911"/>
+            <a:off x="900000" y="1548000"/>
+            <a:ext cx="2088000" cy="142876"/>
           </a:xfrm>
           <a:prstGeom prst="rect">
             <a:avLst/>
@@ -3575,13 +3533,13 @@
           <a:p>
             <a:pPr algn="l">
               <a:lnSpc>
-                <a:spcPts val="1015"/>
+                <a:spcPts val="1087"/>
               </a:lnSpc>
             </a:pPr>
             <a:r>
-              <a:rPr sz="700" b="0">
+              <a:rPr sz="750" b="0">
                 <a:solidFill>
-                  <a:srgbClr val="9E2E4A"/>
+                  <a:srgbClr val="12151C"/>
                 </a:solidFill>
                 <a:latin typeface="맑은 고딕"/>
                 <a:ea typeface="맑은 고딕"/>
@@ -3591,6 +3549,27 @@
           </a:p>
         </p:txBody>
       </p:sp>
+      <p:cxnSp>
+        <p:nvCxnSpPr>
+          <p:cNvPr id="15" name="Connector 14"/>
+          <p:cNvCxnSpPr/>
+          <p:nvPr/>
+        </p:nvCxnSpPr>
+        <p:spPr>
+          <a:xfrm>
+            <a:off x="252000" y="1720800"/>
+            <a:ext cx="2736000" cy="0"/>
+          </a:xfrm>
+          <a:prstGeom prst="line">
+            <a:avLst/>
+          </a:prstGeom>
+          <a:ln w="5760">
+            <a:solidFill>
+              <a:srgbClr val="C4E3FF"/>
+            </a:solidFill>
+          </a:ln>
+        </p:spPr>
+      </p:cxnSp>
     </p:spTree>
   </p:cSld>
   <p:clrMapOvr>
@@ -3605,7 +3584,7 @@
     <p:bg>
       <p:bgPr>
         <a:solidFill>
-          <a:srgbClr val="FAEFF2"/>
+          <a:srgbClr val="2E9BFF"/>
         </a:solidFill>
         <a:effectLst/>
       </p:bgPr>
@@ -3619,20 +3598,20 @@
       <p:grpSpPr/>
       <p:sp>
         <p:nvSpPr>
-          <p:cNvPr id="2" name="Rectangle 1"/>
+          <p:cNvPr id="2" name="Oval 1"/>
           <p:cNvSpPr/>
           <p:nvPr/>
         </p:nvSpPr>
         <p:spPr>
           <a:xfrm>
-            <a:off x="0" y="0"/>
-            <a:ext cx="1224000" cy="1800000"/>
+            <a:off x="1411200" y="295200"/>
+            <a:ext cx="417600" cy="417600"/>
           </a:xfrm>
-          <a:prstGeom prst="rect">
+          <a:prstGeom prst="ellipse">
             <a:avLst/>
           </a:prstGeom>
           <a:solidFill>
-            <a:srgbClr val="D1617D"/>
+            <a:srgbClr val="12151C"/>
           </a:solidFill>
           <a:ln>
             <a:noFill/>
@@ -3648,119 +3627,14 @@
       </p:sp>
       <p:sp>
         <p:nvSpPr>
-          <p:cNvPr id="3" name="Freeform 2"/>
-          <p:cNvSpPr/>
+          <p:cNvPr id="3" name="텍스트"/>
+          <p:cNvSpPr txBox="1"/>
           <p:nvPr/>
         </p:nvSpPr>
         <p:spPr>
           <a:xfrm>
-            <a:off x="363600" y="673200"/>
-            <a:ext cx="496800" cy="226800"/>
-          </a:xfrm>
-          <a:custGeom>
-            <a:avLst/>
-            <a:gdLst/>
-            <a:ahLst/>
-            <a:cxnLst/>
-            <a:rect l="l" t="t" r="r" b="b"/>
-            <a:pathLst>
-              <a:path w="496800" h="226800">
-                <a:moveTo>
-                  <a:pt x="0" y="226800"/>
-                </a:moveTo>
-                <a:lnTo>
-                  <a:pt x="248400" y="0"/>
-                </a:lnTo>
-                <a:lnTo>
-                  <a:pt x="496800" y="226800"/>
-                </a:lnTo>
-                <a:close/>
-              </a:path>
-            </a:pathLst>
-          </a:custGeom>
-          <a:solidFill>
-            <a:srgbClr val="FFFFFF"/>
-          </a:solidFill>
-          <a:ln>
-            <a:noFill/>
-          </a:ln>
-        </p:spPr>
-        <p:txBody>
-          <a:bodyPr rtlCol="0" anchor="ctr"/>
-          <a:lstStyle/>
-          <a:p>
-            <a:pPr algn="ctr"/>
-          </a:p>
-        </p:txBody>
-      </p:sp>
-      <p:sp>
-        <p:nvSpPr>
-          <p:cNvPr id="4" name="Rectangle 3"/>
-          <p:cNvSpPr/>
-          <p:nvPr/>
-        </p:nvSpPr>
-        <p:spPr>
-          <a:xfrm>
-            <a:off x="439200" y="900000"/>
-            <a:ext cx="345600" cy="226800"/>
-          </a:xfrm>
-          <a:prstGeom prst="rect">
-            <a:avLst/>
-          </a:prstGeom>
-          <a:solidFill>
-            <a:srgbClr val="808080"/>
-          </a:solidFill>
-          <a:ln>
-            <a:noFill/>
-          </a:ln>
-        </p:spPr>
-        <p:txBody>
-          <a:bodyPr rtlCol="0" anchor="ctr"/>
-          <a:lstStyle/>
-          <a:p>
-            <a:pPr algn="ctr"/>
-          </a:p>
-        </p:txBody>
-      </p:sp>
-      <p:sp>
-        <p:nvSpPr>
-          <p:cNvPr id="5" name="Rectangle 4"/>
-          <p:cNvSpPr/>
-          <p:nvPr/>
-        </p:nvSpPr>
-        <p:spPr>
-          <a:xfrm>
-            <a:off x="568800" y="975600"/>
-            <a:ext cx="86400" cy="151200"/>
-          </a:xfrm>
-          <a:prstGeom prst="rect">
-            <a:avLst/>
-          </a:prstGeom>
-          <a:solidFill>
-            <a:srgbClr val="FFFFFF"/>
-          </a:solidFill>
-          <a:ln>
-            <a:noFill/>
-          </a:ln>
-        </p:spPr>
-        <p:txBody>
-          <a:bodyPr rtlCol="0" anchor="ctr"/>
-          <a:lstStyle/>
-          <a:p>
-            <a:pPr algn="ctr"/>
-          </a:p>
-        </p:txBody>
-      </p:sp>
-      <p:sp>
-        <p:nvSpPr>
-          <p:cNvPr id="6" name="텍스트"/>
-          <p:cNvSpPr txBox="1"/>
-          <p:nvPr/>
-        </p:nvSpPr>
-        <p:spPr>
-          <a:xfrm>
-            <a:off x="1440000" y="432000"/>
-            <a:ext cx="1584000" cy="792000"/>
+            <a:off x="1368000" y="324000"/>
+            <a:ext cx="504000" cy="360000"/>
           </a:xfrm>
           <a:prstGeom prst="rect">
             <a:avLst/>
@@ -3773,80 +3647,34 @@
           </a:bodyPr>
           <a:lstStyle/>
           <a:p>
-            <a:pPr algn="l">
+            <a:pPr algn="ctr">
               <a:lnSpc>
-                <a:spcPts val="1667"/>
+                <a:spcPts val="3769"/>
               </a:lnSpc>
             </a:pPr>
             <a:r>
-              <a:rPr sz="1150" b="1">
+              <a:rPr sz="2600" b="1">
                 <a:solidFill>
-                  <a:srgbClr val="9E2E4A"/>
+                  <a:srgbClr val="FFFFFF"/>
                 </a:solidFill>
                 <a:latin typeface="맑은 고딕"/>
                 <a:ea typeface="맑은 고딕"/>
               </a:rPr>
-              <a:t>한 번 맺은 인연을</a:t>
-            </a:r>
-          </a:p>
-          <a:p>
-            <a:pPr algn="l">
-              <a:lnSpc>
-                <a:spcPts val="1667"/>
-              </a:lnSpc>
-            </a:pPr>
-            <a:r>
-              <a:rPr sz="1150" b="1">
-                <a:solidFill>
-                  <a:srgbClr val="9E2E4A"/>
-                </a:solidFill>
-                <a:latin typeface="맑은 고딕"/>
-                <a:ea typeface="맑은 고딕"/>
-              </a:rPr>
-              <a:t>오래 지킵니다</a:t>
-            </a:r>
-          </a:p>
-        </p:txBody>
-      </p:sp>
-      <p:sp>
-        <p:nvSpPr>
-          <p:cNvPr id="7" name="Rectangle 6"/>
-          <p:cNvSpPr/>
+              <a:t>회</a:t>
+            </a:r>
+          </a:p>
+        </p:txBody>
+      </p:sp>
+      <p:sp>
+        <p:nvSpPr>
+          <p:cNvPr id="4" name="텍스트"/>
+          <p:cNvSpPr txBox="1"/>
           <p:nvPr/>
         </p:nvSpPr>
         <p:spPr>
           <a:xfrm>
-            <a:off x="1440000" y="1317600"/>
-            <a:ext cx="180000" cy="10800"/>
-          </a:xfrm>
-          <a:prstGeom prst="rect">
-            <a:avLst/>
-          </a:prstGeom>
-          <a:solidFill>
-            <a:srgbClr val="D1617D"/>
-          </a:solidFill>
-          <a:ln>
-            <a:noFill/>
-          </a:ln>
-        </p:spPr>
-        <p:txBody>
-          <a:bodyPr rtlCol="0" anchor="ctr"/>
-          <a:lstStyle/>
-          <a:p>
-            <a:pPr algn="ctr"/>
-          </a:p>
-        </p:txBody>
-      </p:sp>
-      <p:sp>
-        <p:nvSpPr>
-          <p:cNvPr id="8" name="텍스트"/>
-          <p:cNvSpPr txBox="1"/>
-          <p:nvPr/>
-        </p:nvSpPr>
-        <p:spPr>
-          <a:xfrm>
-            <a:off x="1440000" y="1418400"/>
-            <a:ext cx="1584000" cy="108000"/>
+            <a:off x="360000" y="820800"/>
+            <a:ext cx="2520000" cy="161926"/>
           </a:xfrm>
           <a:prstGeom prst="rect">
             <a:avLst/>
@@ -3859,20 +3687,89 @@
           </a:bodyPr>
           <a:lstStyle/>
           <a:p>
-            <a:pPr algn="l">
+            <a:pPr algn="ctr">
               <a:lnSpc>
-                <a:spcPts val="1087"/>
+                <a:spcPts val="1232"/>
               </a:lnSpc>
             </a:pPr>
             <a:r>
-              <a:rPr sz="750" b="1" spc="200">
+              <a:rPr sz="850" b="1" spc="200">
                 <a:solidFill>
-                  <a:srgbClr val="985B6A"/>
+                  <a:srgbClr val="12151C"/>
                 </a:solidFill>
                 <a:latin typeface="맑은 고딕"/>
                 <a:ea typeface="맑은 고딕"/>
               </a:rPr>
               <a:t>회사 · 사무소 이름</a:t>
+            </a:r>
+          </a:p>
+        </p:txBody>
+      </p:sp>
+      <p:sp>
+        <p:nvSpPr>
+          <p:cNvPr id="5" name="Rectangle 4"/>
+          <p:cNvSpPr/>
+          <p:nvPr/>
+        </p:nvSpPr>
+        <p:spPr>
+          <a:xfrm>
+            <a:off x="1530000" y="1051200"/>
+            <a:ext cx="180000" cy="14400"/>
+          </a:xfrm>
+          <a:prstGeom prst="rect">
+            <a:avLst/>
+          </a:prstGeom>
+          <a:solidFill>
+            <a:srgbClr val="12151C"/>
+          </a:solidFill>
+          <a:ln>
+            <a:noFill/>
+          </a:ln>
+        </p:spPr>
+        <p:txBody>
+          <a:bodyPr rtlCol="0" anchor="ctr"/>
+          <a:lstStyle/>
+          <a:p>
+            <a:pPr algn="ctr"/>
+          </a:p>
+        </p:txBody>
+      </p:sp>
+      <p:sp>
+        <p:nvSpPr>
+          <p:cNvPr id="6" name="텍스트"/>
+          <p:cNvSpPr txBox="1"/>
+          <p:nvPr/>
+        </p:nvSpPr>
+        <p:spPr>
+          <a:xfrm>
+            <a:off x="540000" y="1188000"/>
+            <a:ext cx="2160000" cy="360000"/>
+          </a:xfrm>
+          <a:prstGeom prst="rect">
+            <a:avLst/>
+          </a:prstGeom>
+          <a:noFill/>
+        </p:spPr>
+        <p:txBody>
+          <a:bodyPr wrap="square" lIns="0" rIns="0" tIns="0" bIns="0" anchor="t">
+            <a:spAutoFit/>
+          </a:bodyPr>
+          <a:lstStyle/>
+          <a:p>
+            <a:pPr algn="ctr">
+              <a:lnSpc>
+                <a:spcPts val="1305"/>
+              </a:lnSpc>
+            </a:pPr>
+            <a:r>
+              <a:rPr sz="900" b="1">
+                <a:solidFill>
+                  <a:srgbClr val="18324E"/>
+                </a:solidFill>
+                <a:latin typeface="맑은 고딕"/>
+                <a:ea typeface="맑은 고딕"/>
+              </a:rPr>
+              <a:t>한 번 맺은 인연을 오래 지킵니다</a:t>
             </a:r>
           </a:p>
         </p:txBody>

--- a/public/fun/cards/finance/finance-08.pptx
+++ b/public/fun/cards/finance/finance-08.pptx
@@ -3105,8 +3105,8 @@
         </p:nvSpPr>
         <p:spPr>
           <a:xfrm>
-            <a:off x="252000" y="144000"/>
-            <a:ext cx="201600" cy="21600"/>
+            <a:off x="0" y="0"/>
+            <a:ext cx="3240000" cy="36000"/>
           </a:xfrm>
           <a:prstGeom prst="rect">
             <a:avLst/>
@@ -3134,8 +3134,8 @@
         </p:nvSpPr>
         <p:spPr>
           <a:xfrm>
-            <a:off x="252000" y="273600"/>
-            <a:ext cx="2160000" cy="360000"/>
+            <a:off x="252000" y="223200"/>
+            <a:ext cx="1296000" cy="237600"/>
           </a:xfrm>
           <a:prstGeom prst="rect">
             <a:avLst/>
@@ -3150,11 +3150,11 @@
           <a:p>
             <a:pPr algn="l">
               <a:lnSpc>
-                <a:spcPts val="3190"/>
+                <a:spcPts val="1957"/>
               </a:lnSpc>
             </a:pPr>
             <a:r>
-              <a:rPr sz="2200" b="1">
+              <a:rPr sz="1350" b="1" spc="120">
                 <a:solidFill>
                   <a:srgbClr val="12151C"/>
                 </a:solidFill>
@@ -3174,8 +3174,8 @@
         </p:nvSpPr>
         <p:spPr>
           <a:xfrm>
-            <a:off x="252000" y="676800"/>
-            <a:ext cx="2160000" cy="171451"/>
+            <a:off x="252000" y="475200"/>
+            <a:ext cx="1296000" cy="133351"/>
           </a:xfrm>
           <a:prstGeom prst="rect">
             <a:avLst/>
@@ -3190,11 +3190,11 @@
           <a:p>
             <a:pPr algn="l">
               <a:lnSpc>
-                <a:spcPts val="1305"/>
+                <a:spcPts val="1015"/>
               </a:lnSpc>
             </a:pPr>
             <a:r>
-              <a:rPr sz="900" b="0">
+              <a:rPr sz="700" b="0">
                 <a:solidFill>
                   <a:srgbClr val="1D4872"/>
                 </a:solidFill>
@@ -3214,7 +3214,7 @@
         </p:nvSpPr>
         <p:spPr>
           <a:xfrm>
-            <a:off x="1548000" y="230400"/>
+            <a:off x="1548000" y="259200"/>
             <a:ext cx="1440000" cy="123826"/>
           </a:xfrm>
           <a:prstGeom prst="rect">
@@ -3234,7 +3234,7 @@
               </a:lnSpc>
             </a:pPr>
             <a:r>
-              <a:rPr sz="650" b="1" spc="200">
+              <a:rPr sz="650" b="1" spc="220">
                 <a:solidFill>
                   <a:srgbClr val="1D4872"/>
                 </a:solidFill>
@@ -3254,13 +3254,13 @@
         </p:nvCxnSpPr>
         <p:spPr>
           <a:xfrm>
-            <a:off x="252000" y="1051200"/>
+            <a:off x="252000" y="907200"/>
             <a:ext cx="2736000" cy="0"/>
           </a:xfrm>
           <a:prstGeom prst="line">
             <a:avLst/>
           </a:prstGeom>
-          <a:ln w="5760">
+          <a:ln w="3600">
             <a:solidFill>
               <a:srgbClr val="C4E3FF"/>
             </a:solidFill>
@@ -3275,8 +3275,8 @@
         </p:nvSpPr>
         <p:spPr>
           <a:xfrm>
-            <a:off x="252000" y="1123200"/>
-            <a:ext cx="576000" cy="99061"/>
+            <a:off x="252000" y="986400"/>
+            <a:ext cx="576000" cy="91441"/>
           </a:xfrm>
           <a:prstGeom prst="rect">
             <a:avLst/>
@@ -3291,11 +3291,11 @@
           <a:p>
             <a:pPr algn="l">
               <a:lnSpc>
-                <a:spcPts val="754"/>
+                <a:spcPts val="696"/>
               </a:lnSpc>
             </a:pPr>
             <a:r>
-              <a:rPr sz="520" b="1" spc="150">
+              <a:rPr sz="480" b="1" spc="160">
                 <a:solidFill>
                   <a:srgbClr val="1D4872"/>
                 </a:solidFill>
@@ -3315,8 +3315,8 @@
         </p:nvSpPr>
         <p:spPr>
           <a:xfrm>
-            <a:off x="900000" y="1101600"/>
-            <a:ext cx="2088000" cy="142876"/>
+            <a:off x="936000" y="968400"/>
+            <a:ext cx="2052000" cy="133351"/>
           </a:xfrm>
           <a:prstGeom prst="rect">
             <a:avLst/>
@@ -3331,11 +3331,11 @@
           <a:p>
             <a:pPr algn="l">
               <a:lnSpc>
-                <a:spcPts val="1087"/>
+                <a:spcPts val="1015"/>
               </a:lnSpc>
             </a:pPr>
             <a:r>
-              <a:rPr sz="750" b="0">
+              <a:rPr sz="700" b="0">
                 <a:solidFill>
                   <a:srgbClr val="12151C"/>
                 </a:solidFill>
@@ -3355,13 +3355,13 @@
         </p:nvCxnSpPr>
         <p:spPr>
           <a:xfrm>
-            <a:off x="252000" y="1274400"/>
+            <a:off x="252000" y="1137600"/>
             <a:ext cx="2736000" cy="0"/>
           </a:xfrm>
           <a:prstGeom prst="line">
             <a:avLst/>
           </a:prstGeom>
-          <a:ln w="5760">
+          <a:ln w="3600">
             <a:solidFill>
               <a:srgbClr val="C4E3FF"/>
             </a:solidFill>
@@ -3376,8 +3376,8 @@
         </p:nvSpPr>
         <p:spPr>
           <a:xfrm>
-            <a:off x="252000" y="1346400"/>
-            <a:ext cx="576000" cy="99061"/>
+            <a:off x="252000" y="1216800"/>
+            <a:ext cx="576000" cy="91441"/>
           </a:xfrm>
           <a:prstGeom prst="rect">
             <a:avLst/>
@@ -3392,11 +3392,11 @@
           <a:p>
             <a:pPr algn="l">
               <a:lnSpc>
-                <a:spcPts val="754"/>
+                <a:spcPts val="696"/>
               </a:lnSpc>
             </a:pPr>
             <a:r>
-              <a:rPr sz="520" b="1" spc="150">
+              <a:rPr sz="480" b="1" spc="160">
                 <a:solidFill>
                   <a:srgbClr val="1D4872"/>
                 </a:solidFill>
@@ -3416,8 +3416,8 @@
         </p:nvSpPr>
         <p:spPr>
           <a:xfrm>
-            <a:off x="900000" y="1324800"/>
-            <a:ext cx="2088000" cy="142876"/>
+            <a:off x="936000" y="1198800"/>
+            <a:ext cx="2052000" cy="133351"/>
           </a:xfrm>
           <a:prstGeom prst="rect">
             <a:avLst/>
@@ -3432,11 +3432,11 @@
           <a:p>
             <a:pPr algn="l">
               <a:lnSpc>
-                <a:spcPts val="1087"/>
+                <a:spcPts val="1015"/>
               </a:lnSpc>
             </a:pPr>
             <a:r>
-              <a:rPr sz="750" b="0">
+              <a:rPr sz="700" b="0">
                 <a:solidFill>
                   <a:srgbClr val="12151C"/>
                 </a:solidFill>
@@ -3456,13 +3456,13 @@
         </p:nvCxnSpPr>
         <p:spPr>
           <a:xfrm>
-            <a:off x="252000" y="1497600"/>
+            <a:off x="252000" y="1368000"/>
             <a:ext cx="2736000" cy="0"/>
           </a:xfrm>
           <a:prstGeom prst="line">
             <a:avLst/>
           </a:prstGeom>
-          <a:ln w="5760">
+          <a:ln w="3600">
             <a:solidFill>
               <a:srgbClr val="C4E3FF"/>
             </a:solidFill>
@@ -3477,8 +3477,8 @@
         </p:nvSpPr>
         <p:spPr>
           <a:xfrm>
-            <a:off x="252000" y="1569600"/>
-            <a:ext cx="576000" cy="99061"/>
+            <a:off x="252000" y="1447200"/>
+            <a:ext cx="576000" cy="91441"/>
           </a:xfrm>
           <a:prstGeom prst="rect">
             <a:avLst/>
@@ -3493,11 +3493,11 @@
           <a:p>
             <a:pPr algn="l">
               <a:lnSpc>
-                <a:spcPts val="754"/>
+                <a:spcPts val="696"/>
               </a:lnSpc>
             </a:pPr>
             <a:r>
-              <a:rPr sz="520" b="1" spc="150">
+              <a:rPr sz="480" b="1" spc="160">
                 <a:solidFill>
                   <a:srgbClr val="1D4872"/>
                 </a:solidFill>
@@ -3517,8 +3517,8 @@
         </p:nvSpPr>
         <p:spPr>
           <a:xfrm>
-            <a:off x="900000" y="1548000"/>
-            <a:ext cx="2088000" cy="142876"/>
+            <a:off x="936000" y="1429200"/>
+            <a:ext cx="2052000" cy="133351"/>
           </a:xfrm>
           <a:prstGeom prst="rect">
             <a:avLst/>
@@ -3533,11 +3533,11 @@
           <a:p>
             <a:pPr algn="l">
               <a:lnSpc>
-                <a:spcPts val="1087"/>
+                <a:spcPts val="1015"/>
               </a:lnSpc>
             </a:pPr>
             <a:r>
-              <a:rPr sz="750" b="0">
+              <a:rPr sz="700" b="0">
                 <a:solidFill>
                   <a:srgbClr val="12151C"/>
                 </a:solidFill>
@@ -3557,13 +3557,13 @@
         </p:nvCxnSpPr>
         <p:spPr>
           <a:xfrm>
-            <a:off x="252000" y="1720800"/>
+            <a:off x="252000" y="1598400"/>
             <a:ext cx="2736000" cy="0"/>
           </a:xfrm>
           <a:prstGeom prst="line">
             <a:avLst/>
           </a:prstGeom>
-          <a:ln w="5760">
+          <a:ln w="3600">
             <a:solidFill>
               <a:srgbClr val="C4E3FF"/>
             </a:solidFill>
@@ -3598,43 +3598,14 @@
       <p:grpSpPr/>
       <p:sp>
         <p:nvSpPr>
-          <p:cNvPr id="2" name="Oval 1"/>
-          <p:cNvSpPr/>
-          <p:nvPr/>
-        </p:nvSpPr>
-        <p:spPr>
-          <a:xfrm>
-            <a:off x="1411200" y="295200"/>
-            <a:ext cx="417600" cy="417600"/>
-          </a:xfrm>
-          <a:prstGeom prst="ellipse">
-            <a:avLst/>
-          </a:prstGeom>
-          <a:solidFill>
-            <a:srgbClr val="12151C"/>
-          </a:solidFill>
-          <a:ln>
-            <a:noFill/>
-          </a:ln>
-        </p:spPr>
-        <p:txBody>
-          <a:bodyPr rtlCol="0" anchor="ctr"/>
-          <a:lstStyle/>
-          <a:p>
-            <a:pPr algn="ctr"/>
-          </a:p>
-        </p:txBody>
-      </p:sp>
-      <p:sp>
-        <p:nvSpPr>
-          <p:cNvPr id="3" name="텍스트"/>
+          <p:cNvPr id="2" name="텍스트"/>
           <p:cNvSpPr txBox="1"/>
           <p:nvPr/>
         </p:nvSpPr>
         <p:spPr>
           <a:xfrm>
-            <a:off x="1368000" y="324000"/>
-            <a:ext cx="504000" cy="360000"/>
+            <a:off x="252000" y="252000"/>
+            <a:ext cx="1080000" cy="99061"/>
           </a:xfrm>
           <a:prstGeom prst="rect">
             <a:avLst/>
@@ -3642,79 +3613,39 @@
           <a:noFill/>
         </p:spPr>
         <p:txBody>
-          <a:bodyPr wrap="square" lIns="0" rIns="0" tIns="0" bIns="0" anchor="ctr">
+          <a:bodyPr wrap="square" lIns="0" rIns="0" tIns="0" bIns="0" anchor="t">
             <a:spAutoFit/>
           </a:bodyPr>
           <a:lstStyle/>
           <a:p>
-            <a:pPr algn="ctr">
+            <a:pPr algn="l">
               <a:lnSpc>
-                <a:spcPts val="3769"/>
+                <a:spcPts val="754"/>
               </a:lnSpc>
             </a:pPr>
             <a:r>
-              <a:rPr sz="2600" b="1">
+              <a:rPr sz="520" b="1" spc="240">
                 <a:solidFill>
-                  <a:srgbClr val="FFFFFF"/>
+                  <a:srgbClr val="18324E"/>
                 </a:solidFill>
                 <a:latin typeface="맑은 고딕"/>
                 <a:ea typeface="맑은 고딕"/>
               </a:rPr>
-              <a:t>회</a:t>
-            </a:r>
-          </a:p>
-        </p:txBody>
-      </p:sp>
-      <p:sp>
-        <p:nvSpPr>
-          <p:cNvPr id="4" name="텍스트"/>
-          <p:cNvSpPr txBox="1"/>
-          <p:nvPr/>
-        </p:nvSpPr>
-        <p:spPr>
-          <a:xfrm>
-            <a:off x="360000" y="820800"/>
-            <a:ext cx="2520000" cy="161926"/>
-          </a:xfrm>
-          <a:prstGeom prst="rect">
-            <a:avLst/>
-          </a:prstGeom>
-          <a:noFill/>
-        </p:spPr>
-        <p:txBody>
-          <a:bodyPr wrap="square" lIns="0" rIns="0" tIns="0" bIns="0" anchor="t">
-            <a:spAutoFit/>
-          </a:bodyPr>
-          <a:lstStyle/>
-          <a:p>
-            <a:pPr algn="ctr">
-              <a:lnSpc>
-                <a:spcPts val="1232"/>
-              </a:lnSpc>
-            </a:pPr>
-            <a:r>
-              <a:rPr sz="850" b="1" spc="200">
-                <a:solidFill>
-                  <a:srgbClr val="12151C"/>
-                </a:solidFill>
-                <a:latin typeface="맑은 고딕"/>
-                <a:ea typeface="맑은 고딕"/>
-              </a:rPr>
-              <a:t>회사 · 사무소 이름</a:t>
-            </a:r>
-          </a:p>
-        </p:txBody>
-      </p:sp>
-      <p:sp>
-        <p:nvSpPr>
-          <p:cNvPr id="5" name="Rectangle 4"/>
+              <a:t>상담 분야</a:t>
+            </a:r>
+          </a:p>
+        </p:txBody>
+      </p:sp>
+      <p:sp>
+        <p:nvSpPr>
+          <p:cNvPr id="3" name="Rectangle 2"/>
           <p:cNvSpPr/>
           <p:nvPr/>
         </p:nvSpPr>
         <p:spPr>
           <a:xfrm>
-            <a:off x="1530000" y="1051200"/>
-            <a:ext cx="180000" cy="14400"/>
+            <a:off x="252000" y="367200"/>
+            <a:ext cx="108000" cy="14400"/>
           </a:xfrm>
           <a:prstGeom prst="rect">
             <a:avLst/>
@@ -3736,14 +3667,45 @@
       </p:sp>
       <p:sp>
         <p:nvSpPr>
-          <p:cNvPr id="6" name="텍스트"/>
+          <p:cNvPr id="4" name="Rounded Rectangle 3"/>
+          <p:cNvSpPr/>
+          <p:nvPr/>
+        </p:nvSpPr>
+        <p:spPr>
+          <a:xfrm>
+            <a:off x="252000" y="540000"/>
+            <a:ext cx="581567" cy="194361"/>
+          </a:xfrm>
+          <a:prstGeom prst="roundRect">
+            <a:avLst>
+              <a:gd name="adj" fmla="val 50000"/>
+            </a:avLst>
+          </a:prstGeom>
+          <a:noFill/>
+          <a:ln w="3600">
+            <a:solidFill>
+              <a:srgbClr val="18324E"/>
+            </a:solidFill>
+          </a:ln>
+        </p:spPr>
+        <p:txBody>
+          <a:bodyPr rtlCol="0" anchor="ctr"/>
+          <a:lstStyle/>
+          <a:p>
+            <a:pPr algn="ctr"/>
+          </a:p>
+        </p:txBody>
+      </p:sp>
+      <p:sp>
+        <p:nvSpPr>
+          <p:cNvPr id="5" name="텍스트"/>
           <p:cNvSpPr txBox="1"/>
           <p:nvPr/>
         </p:nvSpPr>
         <p:spPr>
           <a:xfrm>
-            <a:off x="540000" y="1188000"/>
-            <a:ext cx="2160000" cy="360000"/>
+            <a:off x="252000" y="540000"/>
+            <a:ext cx="581567" cy="194361"/>
           </a:xfrm>
           <a:prstGeom prst="rect">
             <a:avLst/>
@@ -3751,25 +3713,459 @@
           <a:noFill/>
         </p:spPr>
         <p:txBody>
+          <a:bodyPr wrap="square" lIns="0" rIns="0" tIns="0" bIns="0" anchor="ctr">
+            <a:spAutoFit/>
+          </a:bodyPr>
+          <a:lstStyle/>
+          <a:p>
+            <a:pPr algn="ctr">
+              <a:lnSpc>
+                <a:spcPts val="986"/>
+              </a:lnSpc>
+            </a:pPr>
+            <a:r>
+              <a:rPr sz="680" b="0">
+                <a:solidFill>
+                  <a:srgbClr val="12151C"/>
+                </a:solidFill>
+                <a:latin typeface="맑은 고딕"/>
+                <a:ea typeface="맑은 고딕"/>
+              </a:rPr>
+              <a:t>연금 설계</a:t>
+            </a:r>
+          </a:p>
+        </p:txBody>
+      </p:sp>
+      <p:sp>
+        <p:nvSpPr>
+          <p:cNvPr id="6" name="Rounded Rectangle 5"/>
+          <p:cNvSpPr/>
+          <p:nvPr/>
+        </p:nvSpPr>
+        <p:spPr>
+          <a:xfrm>
+            <a:off x="883967" y="540000"/>
+            <a:ext cx="581567" cy="194361"/>
+          </a:xfrm>
+          <a:prstGeom prst="roundRect">
+            <a:avLst>
+              <a:gd name="adj" fmla="val 50000"/>
+            </a:avLst>
+          </a:prstGeom>
+          <a:noFill/>
+          <a:ln w="3600">
+            <a:solidFill>
+              <a:srgbClr val="18324E"/>
+            </a:solidFill>
+          </a:ln>
+        </p:spPr>
+        <p:txBody>
+          <a:bodyPr rtlCol="0" anchor="ctr"/>
+          <a:lstStyle/>
+          <a:p>
+            <a:pPr algn="ctr"/>
+          </a:p>
+        </p:txBody>
+      </p:sp>
+      <p:sp>
+        <p:nvSpPr>
+          <p:cNvPr id="7" name="텍스트"/>
+          <p:cNvSpPr txBox="1"/>
+          <p:nvPr/>
+        </p:nvSpPr>
+        <p:spPr>
+          <a:xfrm>
+            <a:off x="883967" y="540000"/>
+            <a:ext cx="581567" cy="194361"/>
+          </a:xfrm>
+          <a:prstGeom prst="rect">
+            <a:avLst/>
+          </a:prstGeom>
+          <a:noFill/>
+        </p:spPr>
+        <p:txBody>
+          <a:bodyPr wrap="square" lIns="0" rIns="0" tIns="0" bIns="0" anchor="ctr">
+            <a:spAutoFit/>
+          </a:bodyPr>
+          <a:lstStyle/>
+          <a:p>
+            <a:pPr algn="ctr">
+              <a:lnSpc>
+                <a:spcPts val="986"/>
+              </a:lnSpc>
+            </a:pPr>
+            <a:r>
+              <a:rPr sz="680" b="0">
+                <a:solidFill>
+                  <a:srgbClr val="12151C"/>
+                </a:solidFill>
+                <a:latin typeface="맑은 고딕"/>
+                <a:ea typeface="맑은 고딕"/>
+              </a:rPr>
+              <a:t>대출 안내</a:t>
+            </a:r>
+          </a:p>
+        </p:txBody>
+      </p:sp>
+      <p:sp>
+        <p:nvSpPr>
+          <p:cNvPr id="8" name="Rounded Rectangle 7"/>
+          <p:cNvSpPr/>
+          <p:nvPr/>
+        </p:nvSpPr>
+        <p:spPr>
+          <a:xfrm>
+            <a:off x="1515933" y="540000"/>
+            <a:ext cx="750833" cy="194361"/>
+          </a:xfrm>
+          <a:prstGeom prst="roundRect">
+            <a:avLst>
+              <a:gd name="adj" fmla="val 50000"/>
+            </a:avLst>
+          </a:prstGeom>
+          <a:noFill/>
+          <a:ln w="3600">
+            <a:solidFill>
+              <a:srgbClr val="18324E"/>
+            </a:solidFill>
+          </a:ln>
+        </p:spPr>
+        <p:txBody>
+          <a:bodyPr rtlCol="0" anchor="ctr"/>
+          <a:lstStyle/>
+          <a:p>
+            <a:pPr algn="ctr"/>
+          </a:p>
+        </p:txBody>
+      </p:sp>
+      <p:sp>
+        <p:nvSpPr>
+          <p:cNvPr id="9" name="텍스트"/>
+          <p:cNvSpPr txBox="1"/>
+          <p:nvPr/>
+        </p:nvSpPr>
+        <p:spPr>
+          <a:xfrm>
+            <a:off x="1515933" y="540000"/>
+            <a:ext cx="750833" cy="194361"/>
+          </a:xfrm>
+          <a:prstGeom prst="rect">
+            <a:avLst/>
+          </a:prstGeom>
+          <a:noFill/>
+        </p:spPr>
+        <p:txBody>
+          <a:bodyPr wrap="square" lIns="0" rIns="0" tIns="0" bIns="0" anchor="ctr">
+            <a:spAutoFit/>
+          </a:bodyPr>
+          <a:lstStyle/>
+          <a:p>
+            <a:pPr algn="ctr">
+              <a:lnSpc>
+                <a:spcPts val="986"/>
+              </a:lnSpc>
+            </a:pPr>
+            <a:r>
+              <a:rPr sz="680" b="0">
+                <a:solidFill>
+                  <a:srgbClr val="12151C"/>
+                </a:solidFill>
+                <a:latin typeface="맑은 고딕"/>
+                <a:ea typeface="맑은 고딕"/>
+              </a:rPr>
+              <a:t>상속 · 증여</a:t>
+            </a:r>
+          </a:p>
+        </p:txBody>
+      </p:sp>
+      <p:sp>
+        <p:nvSpPr>
+          <p:cNvPr id="10" name="Rounded Rectangle 9"/>
+          <p:cNvSpPr/>
+          <p:nvPr/>
+        </p:nvSpPr>
+        <p:spPr>
+          <a:xfrm>
+            <a:off x="2317167" y="540000"/>
+            <a:ext cx="666200" cy="194361"/>
+          </a:xfrm>
+          <a:prstGeom prst="roundRect">
+            <a:avLst>
+              <a:gd name="adj" fmla="val 50000"/>
+            </a:avLst>
+          </a:prstGeom>
+          <a:noFill/>
+          <a:ln w="3600">
+            <a:solidFill>
+              <a:srgbClr val="18324E"/>
+            </a:solidFill>
+          </a:ln>
+        </p:spPr>
+        <p:txBody>
+          <a:bodyPr rtlCol="0" anchor="ctr"/>
+          <a:lstStyle/>
+          <a:p>
+            <a:pPr algn="ctr"/>
+          </a:p>
+        </p:txBody>
+      </p:sp>
+      <p:sp>
+        <p:nvSpPr>
+          <p:cNvPr id="11" name="텍스트"/>
+          <p:cNvSpPr txBox="1"/>
+          <p:nvPr/>
+        </p:nvSpPr>
+        <p:spPr>
+          <a:xfrm>
+            <a:off x="2317167" y="540000"/>
+            <a:ext cx="666200" cy="194361"/>
+          </a:xfrm>
+          <a:prstGeom prst="rect">
+            <a:avLst/>
+          </a:prstGeom>
+          <a:noFill/>
+        </p:spPr>
+        <p:txBody>
+          <a:bodyPr wrap="square" lIns="0" rIns="0" tIns="0" bIns="0" anchor="ctr">
+            <a:spAutoFit/>
+          </a:bodyPr>
+          <a:lstStyle/>
+          <a:p>
+            <a:pPr algn="ctr">
+              <a:lnSpc>
+                <a:spcPts val="986"/>
+              </a:lnSpc>
+            </a:pPr>
+            <a:r>
+              <a:rPr sz="680" b="0">
+                <a:solidFill>
+                  <a:srgbClr val="12151C"/>
+                </a:solidFill>
+                <a:latin typeface="맑은 고딕"/>
+                <a:ea typeface="맑은 고딕"/>
+              </a:rPr>
+              <a:t>사업자 상담</a:t>
+            </a:r>
+          </a:p>
+        </p:txBody>
+      </p:sp>
+      <p:cxnSp>
+        <p:nvCxnSpPr>
+          <p:cNvPr id="12" name="Connector 11"/>
+          <p:cNvCxnSpPr/>
+          <p:nvPr/>
+        </p:nvCxnSpPr>
+        <p:spPr>
+          <a:xfrm>
+            <a:off x="252000" y="1339200"/>
+            <a:ext cx="2736000" cy="0"/>
+          </a:xfrm>
+          <a:prstGeom prst="line">
+            <a:avLst/>
+          </a:prstGeom>
+          <a:ln w="3600">
+            <a:solidFill>
+              <a:srgbClr val="2365A4"/>
+            </a:solidFill>
+          </a:ln>
+        </p:spPr>
+      </p:cxnSp>
+      <p:sp>
+        <p:nvSpPr>
+          <p:cNvPr id="13" name="텍스트"/>
+          <p:cNvSpPr txBox="1"/>
+          <p:nvPr/>
+        </p:nvSpPr>
+        <p:spPr>
+          <a:xfrm>
+            <a:off x="252000" y="1422000"/>
+            <a:ext cx="396000" cy="91441"/>
+          </a:xfrm>
+          <a:prstGeom prst="rect">
+            <a:avLst/>
+          </a:prstGeom>
+          <a:noFill/>
+        </p:spPr>
+        <p:txBody>
           <a:bodyPr wrap="square" lIns="0" rIns="0" tIns="0" bIns="0" anchor="t">
             <a:spAutoFit/>
           </a:bodyPr>
           <a:lstStyle/>
           <a:p>
-            <a:pPr algn="ctr">
+            <a:pPr algn="l">
               <a:lnSpc>
-                <a:spcPts val="1305"/>
+                <a:spcPts val="696"/>
               </a:lnSpc>
             </a:pPr>
             <a:r>
-              <a:rPr sz="900" b="1">
+              <a:rPr sz="480" b="1" spc="140">
                 <a:solidFill>
                   <a:srgbClr val="18324E"/>
                 </a:solidFill>
                 <a:latin typeface="맑은 고딕"/>
                 <a:ea typeface="맑은 고딕"/>
               </a:rPr>
-              <a:t>한 번 맺은 인연을 오래 지킵니다</a:t>
+              <a:t>HOURS</a:t>
+            </a:r>
+          </a:p>
+        </p:txBody>
+      </p:sp>
+      <p:sp>
+        <p:nvSpPr>
+          <p:cNvPr id="14" name="텍스트"/>
+          <p:cNvSpPr txBox="1"/>
+          <p:nvPr/>
+        </p:nvSpPr>
+        <p:spPr>
+          <a:xfrm>
+            <a:off x="648000" y="1411200"/>
+            <a:ext cx="2340000" cy="121921"/>
+          </a:xfrm>
+          <a:prstGeom prst="rect">
+            <a:avLst/>
+          </a:prstGeom>
+          <a:noFill/>
+        </p:spPr>
+        <p:txBody>
+          <a:bodyPr wrap="square" lIns="0" rIns="0" tIns="0" bIns="0" anchor="t">
+            <a:spAutoFit/>
+          </a:bodyPr>
+          <a:lstStyle/>
+          <a:p>
+            <a:pPr algn="l">
+              <a:lnSpc>
+                <a:spcPts val="927"/>
+              </a:lnSpc>
+            </a:pPr>
+            <a:r>
+              <a:rPr sz="640" b="0">
+                <a:solidFill>
+                  <a:srgbClr val="12151C"/>
+                </a:solidFill>
+                <a:latin typeface="맑은 고딕"/>
+                <a:ea typeface="맑은 고딕"/>
+              </a:rPr>
+              <a:t>평일 09:00 – 18:00</a:t>
+            </a:r>
+          </a:p>
+        </p:txBody>
+      </p:sp>
+      <p:sp>
+        <p:nvSpPr>
+          <p:cNvPr id="15" name="텍스트"/>
+          <p:cNvSpPr txBox="1"/>
+          <p:nvPr/>
+        </p:nvSpPr>
+        <p:spPr>
+          <a:xfrm>
+            <a:off x="252000" y="1580400"/>
+            <a:ext cx="396000" cy="91441"/>
+          </a:xfrm>
+          <a:prstGeom prst="rect">
+            <a:avLst/>
+          </a:prstGeom>
+          <a:noFill/>
+        </p:spPr>
+        <p:txBody>
+          <a:bodyPr wrap="square" lIns="0" rIns="0" tIns="0" bIns="0" anchor="t">
+            <a:spAutoFit/>
+          </a:bodyPr>
+          <a:lstStyle/>
+          <a:p>
+            <a:pPr algn="l">
+              <a:lnSpc>
+                <a:spcPts val="696"/>
+              </a:lnSpc>
+            </a:pPr>
+            <a:r>
+              <a:rPr sz="480" b="1" spc="140">
+                <a:solidFill>
+                  <a:srgbClr val="18324E"/>
+                </a:solidFill>
+                <a:latin typeface="맑은 고딕"/>
+                <a:ea typeface="맑은 고딕"/>
+              </a:rPr>
+              <a:t>INSTAGRAM</a:t>
+            </a:r>
+          </a:p>
+        </p:txBody>
+      </p:sp>
+      <p:sp>
+        <p:nvSpPr>
+          <p:cNvPr id="16" name="텍스트"/>
+          <p:cNvSpPr txBox="1"/>
+          <p:nvPr/>
+        </p:nvSpPr>
+        <p:spPr>
+          <a:xfrm>
+            <a:off x="648000" y="1569600"/>
+            <a:ext cx="2340000" cy="121921"/>
+          </a:xfrm>
+          <a:prstGeom prst="rect">
+            <a:avLst/>
+          </a:prstGeom>
+          <a:noFill/>
+        </p:spPr>
+        <p:txBody>
+          <a:bodyPr wrap="square" lIns="0" rIns="0" tIns="0" bIns="0" anchor="t">
+            <a:spAutoFit/>
+          </a:bodyPr>
+          <a:lstStyle/>
+          <a:p>
+            <a:pPr algn="l">
+              <a:lnSpc>
+                <a:spcPts val="927"/>
+              </a:lnSpc>
+            </a:pPr>
+            <a:r>
+              <a:rPr sz="640" b="0">
+                <a:solidFill>
+                  <a:srgbClr val="12151C"/>
+                </a:solidFill>
+                <a:latin typeface="맑은 고딕"/>
+                <a:ea typeface="맑은 고딕"/>
+              </a:rPr>
+              <a:t>@아이디</a:t>
+            </a:r>
+          </a:p>
+        </p:txBody>
+      </p:sp>
+      <p:sp>
+        <p:nvSpPr>
+          <p:cNvPr id="17" name="텍스트"/>
+          <p:cNvSpPr txBox="1"/>
+          <p:nvPr/>
+        </p:nvSpPr>
+        <p:spPr>
+          <a:xfrm>
+            <a:off x="1548000" y="1411200"/>
+            <a:ext cx="1440000" cy="123826"/>
+          </a:xfrm>
+          <a:prstGeom prst="rect">
+            <a:avLst/>
+          </a:prstGeom>
+          <a:noFill/>
+        </p:spPr>
+        <p:txBody>
+          <a:bodyPr wrap="square" lIns="0" rIns="0" tIns="0" bIns="0" anchor="t">
+            <a:spAutoFit/>
+          </a:bodyPr>
+          <a:lstStyle/>
+          <a:p>
+            <a:pPr algn="r">
+              <a:lnSpc>
+                <a:spcPts val="942"/>
+              </a:lnSpc>
+            </a:pPr>
+            <a:r>
+              <a:rPr sz="650" b="1" spc="220">
+                <a:solidFill>
+                  <a:srgbClr val="18324E"/>
+                </a:solidFill>
+                <a:latin typeface="맑은 고딕"/>
+                <a:ea typeface="맑은 고딕"/>
+              </a:rPr>
+              <a:t>회사 · 사무소 이름</a:t>
             </a:r>
           </a:p>
         </p:txBody>
